--- a/healthcare_economic_effect/output/pptx/Healthcare_Economic_Effect_Figures_JA.pptx
+++ b/healthcare_economic_effect/output/pptx/Healthcare_Economic_Effect_Figures_JA.pptx
@@ -9,6 +9,7 @@
     <p:sldId id="257" r:id="rId8"/>
     <p:sldId id="258" r:id="rId9"/>
     <p:sldId id="259" r:id="rId10"/>
+    <p:sldId id="260" r:id="rId11"/>
   </p:sldIdLst>
   <p:sldSz cx="12191695" cy="6858000" type="screen4x3"/>
   <p:notesSz cx="6858000" cy="9144000"/>
@@ -3485,6 +3486,110 @@
             </a:pPr>
             <a:r>
               <a:t>医療支出は需要側（I-O乗数）と供給側（健康資本テンポ効果）の二つの経路で経済にリターンをもたらす。</a:t>
+            </a:r>
+          </a:p>
+        </p:txBody>
+      </p:sp>
+    </p:spTree>
+  </p:cSld>
+  <p:clrMapOvr>
+    <a:masterClrMapping/>
+  </p:clrMapOvr>
+</p:sld>
+</file>
+
+<file path=ppt/slides/slide5.xml><?xml version="1.0" encoding="utf-8"?>
+<p:sld xmlns:a="http://schemas.openxmlformats.org/drawingml/2006/main" xmlns:p="http://schemas.openxmlformats.org/presentationml/2006/main" xmlns:r="http://schemas.openxmlformats.org/officeDocument/2006/relationships">
+  <p:cSld>
+    <p:spTree>
+      <p:nvGrpSpPr>
+        <p:cNvPr id="1" name=""/>
+        <p:cNvGrpSpPr/>
+        <p:nvPr/>
+      </p:nvGrpSpPr>
+      <p:grpSpPr/>
+      <p:sp>
+        <p:nvSpPr>
+          <p:cNvPr id="2" name="TextBox 1"/>
+          <p:cNvSpPr txBox="1"/>
+          <p:nvPr/>
+        </p:nvSpPr>
+        <p:spPr>
+          <a:xfrm>
+            <a:off x="457200" y="182880"/>
+            <a:ext cx="11274552" cy="548640"/>
+          </a:xfrm>
+          <a:prstGeom prst="rect">
+            <a:avLst/>
+          </a:prstGeom>
+          <a:noFill/>
+        </p:spPr>
+        <p:txBody>
+          <a:bodyPr wrap="none">
+            <a:spAutoFit/>
+          </a:bodyPr>
+          <a:lstStyle/>
+          <a:p>
+            <a:pPr algn="ctr">
+              <a:defRPr sz="1800" b="1"/>
+            </a:pPr>
+            <a:r>
+              <a:t>図5. テンポ効果の三層構造 — 人口→GDP→医療への移植</a:t>
+            </a:r>
+          </a:p>
+        </p:txBody>
+      </p:sp>
+      <p:pic>
+        <p:nvPicPr>
+          <p:cNvPr id="3" name="Picture 2" descr="fig5_three_layer_analogy_ja.png"/>
+          <p:cNvPicPr>
+            <a:picLocks noChangeAspect="1"/>
+          </p:cNvPicPr>
+          <p:nvPr/>
+        </p:nvPicPr>
+        <p:blipFill>
+          <a:blip r:embed="rId2"/>
+          <a:stretch>
+            <a:fillRect/>
+          </a:stretch>
+        </p:blipFill>
+        <p:spPr>
+          <a:xfrm>
+            <a:off x="1371600" y="914400"/>
+            <a:ext cx="9445752" cy="4572000"/>
+          </a:xfrm>
+          <a:prstGeom prst="rect">
+            <a:avLst/>
+          </a:prstGeom>
+        </p:spPr>
+      </p:pic>
+      <p:sp>
+        <p:nvSpPr>
+          <p:cNvPr id="4" name="TextBox 3"/>
+          <p:cNvSpPr txBox="1"/>
+          <p:nvPr/>
+        </p:nvSpPr>
+        <p:spPr>
+          <a:xfrm>
+            <a:off x="457200" y="5760720"/>
+            <a:ext cx="11274552" cy="731520"/>
+          </a:xfrm>
+          <a:prstGeom prst="rect">
+            <a:avLst/>
+          </a:prstGeom>
+          <a:noFill/>
+        </p:spPr>
+        <p:txBody>
+          <a:bodyPr wrap="square">
+            <a:spAutoFit/>
+          </a:bodyPr>
+          <a:lstStyle/>
+          <a:p>
+            <a:pPr algn="ctr">
+              <a:defRPr sz="1000" i="1"/>
+            </a:pPr>
+            <a:r>
+              <a:t>Bongaarts-Feeneyのテンポ効果を資本会計・医療に三層的に移植。医療のテンポドリフトはGDP（+0.04年/年）の約4倍（+0.15年/年）。</a:t>
             </a:r>
           </a:p>
         </p:txBody>

--- a/healthcare_economic_effect/output/pptx/Healthcare_Economic_Effect_Figures_JA.pptx
+++ b/healthcare_economic_effect/output/pptx/Healthcare_Economic_Effect_Figures_JA.pptx
@@ -3173,7 +3173,7 @@
               <a:defRPr sz="1000" i="1"/>
             </a:pPr>
             <a:r>
-              <a:t>各国の医療支出の産業連関乗数。日本は2.78倍でOECD諸国中最大。出典: Yamada &amp; Imanaka 2015他</a:t>
+              <a:t>各国の医療支出の産業連関乗数。日本は2.78倍で比較対象国中最大。出典: Yamada &amp; Imanaka 2015, Gutierrez-Hernandez 2021他</a:t>
             </a:r>
           </a:p>
         </p:txBody>
@@ -3222,7 +3222,319 @@
               <a:defRPr sz="1800" b="1"/>
             </a:pPr>
             <a:r>
-              <a:t>図2. 医療支出（対GDP%）と平均寿命（OECD, 2019年）</a:t>
+              <a:t>図2. テンポ効果の三層構造 — 人口→GDP→医療への移植</a:t>
+            </a:r>
+          </a:p>
+        </p:txBody>
+      </p:sp>
+      <p:pic>
+        <p:nvPicPr>
+          <p:cNvPr id="3" name="Picture 2" descr="fig5_three_layer_analogy_ja.png"/>
+          <p:cNvPicPr>
+            <a:picLocks noChangeAspect="1"/>
+          </p:cNvPicPr>
+          <p:nvPr/>
+        </p:nvPicPr>
+        <p:blipFill>
+          <a:blip r:embed="rId2"/>
+          <a:stretch>
+            <a:fillRect/>
+          </a:stretch>
+        </p:blipFill>
+        <p:spPr>
+          <a:xfrm>
+            <a:off x="1371600" y="914400"/>
+            <a:ext cx="9445752" cy="4572000"/>
+          </a:xfrm>
+          <a:prstGeom prst="rect">
+            <a:avLst/>
+          </a:prstGeom>
+        </p:spPr>
+      </p:pic>
+      <p:sp>
+        <p:nvSpPr>
+          <p:cNvPr id="4" name="TextBox 3"/>
+          <p:cNvSpPr txBox="1"/>
+          <p:nvPr/>
+        </p:nvSpPr>
+        <p:spPr>
+          <a:xfrm>
+            <a:off x="457200" y="5760720"/>
+            <a:ext cx="11274552" cy="731520"/>
+          </a:xfrm>
+          <a:prstGeom prst="rect">
+            <a:avLst/>
+          </a:prstGeom>
+          <a:noFill/>
+        </p:spPr>
+        <p:txBody>
+          <a:bodyPr wrap="square">
+            <a:spAutoFit/>
+          </a:bodyPr>
+          <a:lstStyle/>
+          <a:p>
+            <a:pPr algn="ctr">
+              <a:defRPr sz="1000" i="1"/>
+            </a:pPr>
+            <a:r>
+              <a:t>Bongaarts-Feeneyのテンポ効果を資本会計・医療に三層的に移植。医療のテンポドリフト（+0.15年/年）はGDP（+0.04年/年）の約4倍。</a:t>
+            </a:r>
+          </a:p>
+        </p:txBody>
+      </p:sp>
+    </p:spTree>
+  </p:cSld>
+  <p:clrMapOvr>
+    <a:masterClrMapping/>
+  </p:clrMapOvr>
+</p:sld>
+</file>
+
+<file path=ppt/slides/slide3.xml><?xml version="1.0" encoding="utf-8"?>
+<p:sld xmlns:a="http://schemas.openxmlformats.org/drawingml/2006/main" xmlns:p="http://schemas.openxmlformats.org/presentationml/2006/main" xmlns:r="http://schemas.openxmlformats.org/officeDocument/2006/relationships">
+  <p:cSld>
+    <p:spTree>
+      <p:nvGrpSpPr>
+        <p:cNvPr id="1" name=""/>
+        <p:cNvGrpSpPr/>
+        <p:nvPr/>
+      </p:nvGrpSpPr>
+      <p:grpSpPr/>
+      <p:sp>
+        <p:nvSpPr>
+          <p:cNvPr id="2" name="TextBox 1"/>
+          <p:cNvSpPr txBox="1"/>
+          <p:nvPr/>
+        </p:nvSpPr>
+        <p:spPr>
+          <a:xfrm>
+            <a:off x="457200" y="182880"/>
+            <a:ext cx="11274552" cy="548640"/>
+          </a:xfrm>
+          <a:prstGeom prst="rect">
+            <a:avLst/>
+          </a:prstGeom>
+          <a:noFill/>
+        </p:spPr>
+        <p:txBody>
+          <a:bodyPr wrap="none">
+            <a:spAutoFit/>
+          </a:bodyPr>
+          <a:lstStyle/>
+          <a:p>
+            <a:pPr algn="ctr">
+              <a:defRPr sz="1800" b="1"/>
+            </a:pPr>
+            <a:r>
+              <a:t>図3. 二重リターン・フレームワーク概念図</a:t>
+            </a:r>
+          </a:p>
+        </p:txBody>
+      </p:sp>
+      <p:pic>
+        <p:nvPicPr>
+          <p:cNvPr id="3" name="Picture 2" descr="fig4_dual_return_schematic.png"/>
+          <p:cNvPicPr>
+            <a:picLocks noChangeAspect="1"/>
+          </p:cNvPicPr>
+          <p:nvPr/>
+        </p:nvPicPr>
+        <p:blipFill>
+          <a:blip r:embed="rId2"/>
+          <a:stretch>
+            <a:fillRect/>
+          </a:stretch>
+        </p:blipFill>
+        <p:spPr>
+          <a:xfrm>
+            <a:off x="1371600" y="914400"/>
+            <a:ext cx="9445752" cy="4572000"/>
+          </a:xfrm>
+          <a:prstGeom prst="rect">
+            <a:avLst/>
+          </a:prstGeom>
+        </p:spPr>
+      </p:pic>
+      <p:sp>
+        <p:nvSpPr>
+          <p:cNvPr id="4" name="TextBox 3"/>
+          <p:cNvSpPr txBox="1"/>
+          <p:nvPr/>
+        </p:nvSpPr>
+        <p:spPr>
+          <a:xfrm>
+            <a:off x="457200" y="5760720"/>
+            <a:ext cx="11274552" cy="731520"/>
+          </a:xfrm>
+          <a:prstGeom prst="rect">
+            <a:avLst/>
+          </a:prstGeom>
+          <a:noFill/>
+        </p:spPr>
+        <p:txBody>
+          <a:bodyPr wrap="square">
+            <a:spAutoFit/>
+          </a:bodyPr>
+          <a:lstStyle/>
+          <a:p>
+            <a:pPr algn="ctr">
+              <a:defRPr sz="1000" i="1"/>
+            </a:pPr>
+            <a:r>
+              <a:t>医療支出は需要側（I-O乗数）と供給側（健康資本テンポ効果）の二つの経路で経済にリターンをもたらす。</a:t>
+            </a:r>
+          </a:p>
+        </p:txBody>
+      </p:sp>
+    </p:spTree>
+  </p:cSld>
+  <p:clrMapOvr>
+    <a:masterClrMapping/>
+  </p:clrMapOvr>
+</p:sld>
+</file>
+
+<file path=ppt/slides/slide4.xml><?xml version="1.0" encoding="utf-8"?>
+<p:sld xmlns:a="http://schemas.openxmlformats.org/drawingml/2006/main" xmlns:p="http://schemas.openxmlformats.org/presentationml/2006/main" xmlns:r="http://schemas.openxmlformats.org/officeDocument/2006/relationships">
+  <p:cSld>
+    <p:spTree>
+      <p:nvGrpSpPr>
+        <p:cNvPr id="1" name=""/>
+        <p:cNvGrpSpPr/>
+        <p:nvPr/>
+      </p:nvGrpSpPr>
+      <p:grpSpPr/>
+      <p:sp>
+        <p:nvSpPr>
+          <p:cNvPr id="2" name="TextBox 1"/>
+          <p:cNvSpPr txBox="1"/>
+          <p:nvPr/>
+        </p:nvSpPr>
+        <p:spPr>
+          <a:xfrm>
+            <a:off x="457200" y="182880"/>
+            <a:ext cx="11274552" cy="548640"/>
+          </a:xfrm>
+          <a:prstGeom prst="rect">
+            <a:avLst/>
+          </a:prstGeom>
+          <a:noFill/>
+        </p:spPr>
+        <p:txBody>
+          <a:bodyPr wrap="none">
+            <a:spAutoFit/>
+          </a:bodyPr>
+          <a:lstStyle/>
+          <a:p>
+            <a:pPr algn="ctr">
+              <a:defRPr sz="1800" b="1"/>
+            </a:pPr>
+            <a:r>
+              <a:t>図4. 各国の医療支出財政回収率（τ·m / pf）</a:t>
+            </a:r>
+          </a:p>
+        </p:txBody>
+      </p:sp>
+      <p:pic>
+        <p:nvPicPr>
+          <p:cNvPr id="3" name="Picture 2" descr="fig3_fiscal_sustainability.png"/>
+          <p:cNvPicPr>
+            <a:picLocks noChangeAspect="1"/>
+          </p:cNvPicPr>
+          <p:nvPr/>
+        </p:nvPicPr>
+        <p:blipFill>
+          <a:blip r:embed="rId2"/>
+          <a:stretch>
+            <a:fillRect/>
+          </a:stretch>
+        </p:blipFill>
+        <p:spPr>
+          <a:xfrm>
+            <a:off x="1371600" y="914400"/>
+            <a:ext cx="9445752" cy="4572000"/>
+          </a:xfrm>
+          <a:prstGeom prst="rect">
+            <a:avLst/>
+          </a:prstGeom>
+        </p:spPr>
+      </p:pic>
+      <p:sp>
+        <p:nvSpPr>
+          <p:cNvPr id="4" name="TextBox 3"/>
+          <p:cNvSpPr txBox="1"/>
+          <p:nvPr/>
+        </p:nvSpPr>
+        <p:spPr>
+          <a:xfrm>
+            <a:off x="457200" y="5760720"/>
+            <a:ext cx="11274552" cy="731520"/>
+          </a:xfrm>
+          <a:prstGeom prst="rect">
+            <a:avLst/>
+          </a:prstGeom>
+          <a:noFill/>
+        </p:spPr>
+        <p:txBody>
+          <a:bodyPr wrap="square">
+            <a:spAutoFit/>
+          </a:bodyPr>
+          <a:lstStyle/>
+          <a:p>
+            <a:pPr algn="ctr">
+              <a:defRPr sz="1000" i="1"/>
+            </a:pPr>
+            <a:r>
+              <a:t>財政回収率 = (実効税率 × I-O乗数) / 公的負担割合。1.0以上は税収還流が公的支出を上回ることを意味する。</a:t>
+            </a:r>
+          </a:p>
+        </p:txBody>
+      </p:sp>
+    </p:spTree>
+  </p:cSld>
+  <p:clrMapOvr>
+    <a:masterClrMapping/>
+  </p:clrMapOvr>
+</p:sld>
+</file>
+
+<file path=ppt/slides/slide5.xml><?xml version="1.0" encoding="utf-8"?>
+<p:sld xmlns:a="http://schemas.openxmlformats.org/drawingml/2006/main" xmlns:p="http://schemas.openxmlformats.org/presentationml/2006/main" xmlns:r="http://schemas.openxmlformats.org/officeDocument/2006/relationships">
+  <p:cSld>
+    <p:spTree>
+      <p:nvGrpSpPr>
+        <p:cNvPr id="1" name=""/>
+        <p:cNvGrpSpPr/>
+        <p:nvPr/>
+      </p:nvGrpSpPr>
+      <p:grpSpPr/>
+      <p:sp>
+        <p:nvSpPr>
+          <p:cNvPr id="2" name="TextBox 1"/>
+          <p:cNvSpPr txBox="1"/>
+          <p:nvPr/>
+        </p:nvSpPr>
+        <p:spPr>
+          <a:xfrm>
+            <a:off x="457200" y="182880"/>
+            <a:ext cx="11274552" cy="548640"/>
+          </a:xfrm>
+          <a:prstGeom prst="rect">
+            <a:avLst/>
+          </a:prstGeom>
+          <a:noFill/>
+        </p:spPr>
+        <p:txBody>
+          <a:bodyPr wrap="none">
+            <a:spAutoFit/>
+          </a:bodyPr>
+          <a:lstStyle/>
+          <a:p>
+            <a:pPr algn="ctr">
+              <a:defRPr sz="1800" b="1"/>
+            </a:pPr>
+            <a:r>
+              <a:t>図5. 医療支出（対GDP%）と平均寿命（OECD, 2019年）</a:t>
             </a:r>
           </a:p>
         </p:txBody>
@@ -3277,319 +3589,7 @@
               <a:defRPr sz="1000" i="1"/>
             </a:pPr>
             <a:r>
-              <a:t>横軸: 対GDP医療支出割合(%), 縦軸: 出生時平均寿命(年). 二次関数フィットは逓減的関係を示す。</a:t>
-            </a:r>
-          </a:p>
-        </p:txBody>
-      </p:sp>
-    </p:spTree>
-  </p:cSld>
-  <p:clrMapOvr>
-    <a:masterClrMapping/>
-  </p:clrMapOvr>
-</p:sld>
-</file>
-
-<file path=ppt/slides/slide3.xml><?xml version="1.0" encoding="utf-8"?>
-<p:sld xmlns:a="http://schemas.openxmlformats.org/drawingml/2006/main" xmlns:p="http://schemas.openxmlformats.org/presentationml/2006/main" xmlns:r="http://schemas.openxmlformats.org/officeDocument/2006/relationships">
-  <p:cSld>
-    <p:spTree>
-      <p:nvGrpSpPr>
-        <p:cNvPr id="1" name=""/>
-        <p:cNvGrpSpPr/>
-        <p:nvPr/>
-      </p:nvGrpSpPr>
-      <p:grpSpPr/>
-      <p:sp>
-        <p:nvSpPr>
-          <p:cNvPr id="2" name="TextBox 1"/>
-          <p:cNvSpPr txBox="1"/>
-          <p:nvPr/>
-        </p:nvSpPr>
-        <p:spPr>
-          <a:xfrm>
-            <a:off x="457200" y="182880"/>
-            <a:ext cx="11274552" cy="548640"/>
-          </a:xfrm>
-          <a:prstGeom prst="rect">
-            <a:avLst/>
-          </a:prstGeom>
-          <a:noFill/>
-        </p:spPr>
-        <p:txBody>
-          <a:bodyPr wrap="none">
-            <a:spAutoFit/>
-          </a:bodyPr>
-          <a:lstStyle/>
-          <a:p>
-            <a:pPr algn="ctr">
-              <a:defRPr sz="1800" b="1"/>
-            </a:pPr>
-            <a:r>
-              <a:t>図3. 各国の医療支出財政回収率（τ·m / pf）</a:t>
-            </a:r>
-          </a:p>
-        </p:txBody>
-      </p:sp>
-      <p:pic>
-        <p:nvPicPr>
-          <p:cNvPr id="3" name="Picture 2" descr="fig3_fiscal_sustainability.png"/>
-          <p:cNvPicPr>
-            <a:picLocks noChangeAspect="1"/>
-          </p:cNvPicPr>
-          <p:nvPr/>
-        </p:nvPicPr>
-        <p:blipFill>
-          <a:blip r:embed="rId2"/>
-          <a:stretch>
-            <a:fillRect/>
-          </a:stretch>
-        </p:blipFill>
-        <p:spPr>
-          <a:xfrm>
-            <a:off x="1371600" y="914400"/>
-            <a:ext cx="9445752" cy="4572000"/>
-          </a:xfrm>
-          <a:prstGeom prst="rect">
-            <a:avLst/>
-          </a:prstGeom>
-        </p:spPr>
-      </p:pic>
-      <p:sp>
-        <p:nvSpPr>
-          <p:cNvPr id="4" name="TextBox 3"/>
-          <p:cNvSpPr txBox="1"/>
-          <p:nvPr/>
-        </p:nvSpPr>
-        <p:spPr>
-          <a:xfrm>
-            <a:off x="457200" y="5760720"/>
-            <a:ext cx="11274552" cy="731520"/>
-          </a:xfrm>
-          <a:prstGeom prst="rect">
-            <a:avLst/>
-          </a:prstGeom>
-          <a:noFill/>
-        </p:spPr>
-        <p:txBody>
-          <a:bodyPr wrap="square">
-            <a:spAutoFit/>
-          </a:bodyPr>
-          <a:lstStyle/>
-          <a:p>
-            <a:pPr algn="ctr">
-              <a:defRPr sz="1000" i="1"/>
-            </a:pPr>
-            <a:r>
-              <a:t>財政回収率 = (実効税率 × I-O乗数) / 公的負担割合。1.0以上は税収還流が公的支出を上回ることを意味する。</a:t>
-            </a:r>
-          </a:p>
-        </p:txBody>
-      </p:sp>
-    </p:spTree>
-  </p:cSld>
-  <p:clrMapOvr>
-    <a:masterClrMapping/>
-  </p:clrMapOvr>
-</p:sld>
-</file>
-
-<file path=ppt/slides/slide4.xml><?xml version="1.0" encoding="utf-8"?>
-<p:sld xmlns:a="http://schemas.openxmlformats.org/drawingml/2006/main" xmlns:p="http://schemas.openxmlformats.org/presentationml/2006/main" xmlns:r="http://schemas.openxmlformats.org/officeDocument/2006/relationships">
-  <p:cSld>
-    <p:spTree>
-      <p:nvGrpSpPr>
-        <p:cNvPr id="1" name=""/>
-        <p:cNvGrpSpPr/>
-        <p:nvPr/>
-      </p:nvGrpSpPr>
-      <p:grpSpPr/>
-      <p:sp>
-        <p:nvSpPr>
-          <p:cNvPr id="2" name="TextBox 1"/>
-          <p:cNvSpPr txBox="1"/>
-          <p:nvPr/>
-        </p:nvSpPr>
-        <p:spPr>
-          <a:xfrm>
-            <a:off x="457200" y="182880"/>
-            <a:ext cx="11274552" cy="548640"/>
-          </a:xfrm>
-          <a:prstGeom prst="rect">
-            <a:avLst/>
-          </a:prstGeom>
-          <a:noFill/>
-        </p:spPr>
-        <p:txBody>
-          <a:bodyPr wrap="none">
-            <a:spAutoFit/>
-          </a:bodyPr>
-          <a:lstStyle/>
-          <a:p>
-            <a:pPr algn="ctr">
-              <a:defRPr sz="1800" b="1"/>
-            </a:pPr>
-            <a:r>
-              <a:t>図4. 二重リターン・フレームワーク概念図</a:t>
-            </a:r>
-          </a:p>
-        </p:txBody>
-      </p:sp>
-      <p:pic>
-        <p:nvPicPr>
-          <p:cNvPr id="3" name="Picture 2" descr="fig4_dual_return_schematic.png"/>
-          <p:cNvPicPr>
-            <a:picLocks noChangeAspect="1"/>
-          </p:cNvPicPr>
-          <p:nvPr/>
-        </p:nvPicPr>
-        <p:blipFill>
-          <a:blip r:embed="rId2"/>
-          <a:stretch>
-            <a:fillRect/>
-          </a:stretch>
-        </p:blipFill>
-        <p:spPr>
-          <a:xfrm>
-            <a:off x="1371600" y="914400"/>
-            <a:ext cx="9445752" cy="4572000"/>
-          </a:xfrm>
-          <a:prstGeom prst="rect">
-            <a:avLst/>
-          </a:prstGeom>
-        </p:spPr>
-      </p:pic>
-      <p:sp>
-        <p:nvSpPr>
-          <p:cNvPr id="4" name="TextBox 3"/>
-          <p:cNvSpPr txBox="1"/>
-          <p:nvPr/>
-        </p:nvSpPr>
-        <p:spPr>
-          <a:xfrm>
-            <a:off x="457200" y="5760720"/>
-            <a:ext cx="11274552" cy="731520"/>
-          </a:xfrm>
-          <a:prstGeom prst="rect">
-            <a:avLst/>
-          </a:prstGeom>
-          <a:noFill/>
-        </p:spPr>
-        <p:txBody>
-          <a:bodyPr wrap="square">
-            <a:spAutoFit/>
-          </a:bodyPr>
-          <a:lstStyle/>
-          <a:p>
-            <a:pPr algn="ctr">
-              <a:defRPr sz="1000" i="1"/>
-            </a:pPr>
-            <a:r>
-              <a:t>医療支出は需要側（I-O乗数）と供給側（健康資本テンポ効果）の二つの経路で経済にリターンをもたらす。</a:t>
-            </a:r>
-          </a:p>
-        </p:txBody>
-      </p:sp>
-    </p:spTree>
-  </p:cSld>
-  <p:clrMapOvr>
-    <a:masterClrMapping/>
-  </p:clrMapOvr>
-</p:sld>
-</file>
-
-<file path=ppt/slides/slide5.xml><?xml version="1.0" encoding="utf-8"?>
-<p:sld xmlns:a="http://schemas.openxmlformats.org/drawingml/2006/main" xmlns:p="http://schemas.openxmlformats.org/presentationml/2006/main" xmlns:r="http://schemas.openxmlformats.org/officeDocument/2006/relationships">
-  <p:cSld>
-    <p:spTree>
-      <p:nvGrpSpPr>
-        <p:cNvPr id="1" name=""/>
-        <p:cNvGrpSpPr/>
-        <p:nvPr/>
-      </p:nvGrpSpPr>
-      <p:grpSpPr/>
-      <p:sp>
-        <p:nvSpPr>
-          <p:cNvPr id="2" name="TextBox 1"/>
-          <p:cNvSpPr txBox="1"/>
-          <p:nvPr/>
-        </p:nvSpPr>
-        <p:spPr>
-          <a:xfrm>
-            <a:off x="457200" y="182880"/>
-            <a:ext cx="11274552" cy="548640"/>
-          </a:xfrm>
-          <a:prstGeom prst="rect">
-            <a:avLst/>
-          </a:prstGeom>
-          <a:noFill/>
-        </p:spPr>
-        <p:txBody>
-          <a:bodyPr wrap="none">
-            <a:spAutoFit/>
-          </a:bodyPr>
-          <a:lstStyle/>
-          <a:p>
-            <a:pPr algn="ctr">
-              <a:defRPr sz="1800" b="1"/>
-            </a:pPr>
-            <a:r>
-              <a:t>図5. テンポ効果の三層構造 — 人口→GDP→医療への移植</a:t>
-            </a:r>
-          </a:p>
-        </p:txBody>
-      </p:sp>
-      <p:pic>
-        <p:nvPicPr>
-          <p:cNvPr id="3" name="Picture 2" descr="fig5_three_layer_analogy_ja.png"/>
-          <p:cNvPicPr>
-            <a:picLocks noChangeAspect="1"/>
-          </p:cNvPicPr>
-          <p:nvPr/>
-        </p:nvPicPr>
-        <p:blipFill>
-          <a:blip r:embed="rId2"/>
-          <a:stretch>
-            <a:fillRect/>
-          </a:stretch>
-        </p:blipFill>
-        <p:spPr>
-          <a:xfrm>
-            <a:off x="1371600" y="914400"/>
-            <a:ext cx="9445752" cy="4572000"/>
-          </a:xfrm>
-          <a:prstGeom prst="rect">
-            <a:avLst/>
-          </a:prstGeom>
-        </p:spPr>
-      </p:pic>
-      <p:sp>
-        <p:nvSpPr>
-          <p:cNvPr id="4" name="TextBox 3"/>
-          <p:cNvSpPr txBox="1"/>
-          <p:nvPr/>
-        </p:nvSpPr>
-        <p:spPr>
-          <a:xfrm>
-            <a:off x="457200" y="5760720"/>
-            <a:ext cx="11274552" cy="731520"/>
-          </a:xfrm>
-          <a:prstGeom prst="rect">
-            <a:avLst/>
-          </a:prstGeom>
-          <a:noFill/>
-        </p:spPr>
-        <p:txBody>
-          <a:bodyPr wrap="square">
-            <a:spAutoFit/>
-          </a:bodyPr>
-          <a:lstStyle/>
-          <a:p>
-            <a:pPr algn="ctr">
-              <a:defRPr sz="1000" i="1"/>
-            </a:pPr>
-            <a:r>
-              <a:t>Bongaarts-Feeneyのテンポ効果を資本会計・医療に三層的に移植。医療のテンポドリフトはGDP（+0.04年/年）の約4倍（+0.15年/年）。</a:t>
+              <a:t>横軸: 対GDP医療支出割合(%), 縦軸: 出生時平均寿命(年). 米国を除く線形フィット。米国は外れ値として別表示。</a:t>
             </a:r>
           </a:p>
         </p:txBody>

--- a/healthcare_economic_effect/output/pptx/Healthcare_Economic_Effect_Figures_JA.pptx
+++ b/healthcare_economic_effect/output/pptx/Healthcare_Economic_Effect_Figures_JA.pptx
@@ -10,6 +10,9 @@
     <p:sldId id="258" r:id="rId9"/>
     <p:sldId id="259" r:id="rId10"/>
     <p:sldId id="260" r:id="rId11"/>
+    <p:sldId id="261" r:id="rId12"/>
+    <p:sldId id="262" r:id="rId13"/>
+    <p:sldId id="263" r:id="rId14"/>
   </p:sldIdLst>
   <p:sldSz cx="12191695" cy="6858000" type="screen4x3"/>
   <p:notesSz cx="6858000" cy="9144000"/>
@@ -3590,6 +3593,318 @@
             </a:pPr>
             <a:r>
               <a:t>横軸: 対GDP医療支出割合(%), 縦軸: 出生時平均寿命(年). 米国を除く線形フィット。米国は外れ値として別表示。</a:t>
+            </a:r>
+          </a:p>
+        </p:txBody>
+      </p:sp>
+    </p:spTree>
+  </p:cSld>
+  <p:clrMapOvr>
+    <a:masterClrMapping/>
+  </p:clrMapOvr>
+</p:sld>
+</file>
+
+<file path=ppt/slides/slide6.xml><?xml version="1.0" encoding="utf-8"?>
+<p:sld xmlns:a="http://schemas.openxmlformats.org/drawingml/2006/main" xmlns:p="http://schemas.openxmlformats.org/presentationml/2006/main" xmlns:r="http://schemas.openxmlformats.org/officeDocument/2006/relationships">
+  <p:cSld>
+    <p:spTree>
+      <p:nvGrpSpPr>
+        <p:cNvPr id="1" name=""/>
+        <p:cNvGrpSpPr/>
+        <p:nvPr/>
+      </p:nvGrpSpPr>
+      <p:grpSpPr/>
+      <p:sp>
+        <p:nvSpPr>
+          <p:cNvPr id="2" name="TextBox 1"/>
+          <p:cNvSpPr txBox="1"/>
+          <p:nvPr/>
+        </p:nvSpPr>
+        <p:spPr>
+          <a:xfrm>
+            <a:off x="457200" y="182880"/>
+            <a:ext cx="11274552" cy="548640"/>
+          </a:xfrm>
+          <a:prstGeom prst="rect">
+            <a:avLst/>
+          </a:prstGeom>
+          <a:noFill/>
+        </p:spPr>
+        <p:txBody>
+          <a:bodyPr wrap="none">
+            <a:spAutoFit/>
+          </a:bodyPr>
+          <a:lstStyle/>
+          <a:p>
+            <a:pPr algn="ctr">
+              <a:defRPr sz="1800" b="1"/>
+            </a:pPr>
+            <a:r>
+              <a:t>図6. 画像診断装置密度（CT+MRI、人口100万人あたり、OECD 2021年）</a:t>
+            </a:r>
+          </a:p>
+        </p:txBody>
+      </p:sp>
+      <p:pic>
+        <p:nvPicPr>
+          <p:cNvPr id="3" name="Picture 2" descr="fig6_equipment_density_ja.png"/>
+          <p:cNvPicPr>
+            <a:picLocks noChangeAspect="1"/>
+          </p:cNvPicPr>
+          <p:nvPr/>
+        </p:nvPicPr>
+        <p:blipFill>
+          <a:blip r:embed="rId2"/>
+          <a:stretch>
+            <a:fillRect/>
+          </a:stretch>
+        </p:blipFill>
+        <p:spPr>
+          <a:xfrm>
+            <a:off x="1371600" y="914400"/>
+            <a:ext cx="9445752" cy="4572000"/>
+          </a:xfrm>
+          <a:prstGeom prst="rect">
+            <a:avLst/>
+          </a:prstGeom>
+        </p:spPr>
+      </p:pic>
+      <p:sp>
+        <p:nvSpPr>
+          <p:cNvPr id="4" name="TextBox 3"/>
+          <p:cNvSpPr txBox="1"/>
+          <p:nvPr/>
+        </p:nvSpPr>
+        <p:spPr>
+          <a:xfrm>
+            <a:off x="457200" y="5760720"/>
+            <a:ext cx="11274552" cy="731520"/>
+          </a:xfrm>
+          <a:prstGeom prst="rect">
+            <a:avLst/>
+          </a:prstGeom>
+          <a:noFill/>
+        </p:spPr>
+        <p:txBody>
+          <a:bodyPr wrap="square">
+            <a:spAutoFit/>
+          </a:bodyPr>
+          <a:lstStyle/>
+          <a:p>
+            <a:pPr algn="ctr">
+              <a:defRPr sz="1000" i="1"/>
+            </a:pPr>
+            <a:r>
+              <a:t>CT+MRI合計の人口100万人あたり台数。日本（赤）は170.9台/百万人でOECD中央値の約4倍。</a:t>
+            </a:r>
+          </a:p>
+        </p:txBody>
+      </p:sp>
+    </p:spTree>
+  </p:cSld>
+  <p:clrMapOvr>
+    <a:masterClrMapping/>
+  </p:clrMapOvr>
+</p:sld>
+</file>
+
+<file path=ppt/slides/slide7.xml><?xml version="1.0" encoding="utf-8"?>
+<p:sld xmlns:a="http://schemas.openxmlformats.org/drawingml/2006/main" xmlns:p="http://schemas.openxmlformats.org/presentationml/2006/main" xmlns:r="http://schemas.openxmlformats.org/officeDocument/2006/relationships">
+  <p:cSld>
+    <p:spTree>
+      <p:nvGrpSpPr>
+        <p:cNvPr id="1" name=""/>
+        <p:cNvGrpSpPr/>
+        <p:nvPr/>
+      </p:nvGrpSpPr>
+      <p:grpSpPr/>
+      <p:sp>
+        <p:nvSpPr>
+          <p:cNvPr id="2" name="TextBox 1"/>
+          <p:cNvSpPr txBox="1"/>
+          <p:nvPr/>
+        </p:nvSpPr>
+        <p:spPr>
+          <a:xfrm>
+            <a:off x="457200" y="182880"/>
+            <a:ext cx="11274552" cy="548640"/>
+          </a:xfrm>
+          <a:prstGeom prst="rect">
+            <a:avLst/>
+          </a:prstGeom>
+          <a:noFill/>
+        </p:spPr>
+        <p:txBody>
+          <a:bodyPr wrap="none">
+            <a:spAutoFit/>
+          </a:bodyPr>
+          <a:lstStyle/>
+          <a:p>
+            <a:pPr algn="ctr">
+              <a:defRPr sz="1800" b="1"/>
+            </a:pPr>
+            <a:r>
+              <a:t>図7. 医療関連輸入漏出率（%CHE）と実効I-O乗数の関係</a:t>
+            </a:r>
+          </a:p>
+        </p:txBody>
+      </p:sp>
+      <p:pic>
+        <p:nvPicPr>
+          <p:cNvPr id="3" name="Picture 2" descr="fig7_import_leakage_multiplier_ja.png"/>
+          <p:cNvPicPr>
+            <a:picLocks noChangeAspect="1"/>
+          </p:cNvPicPr>
+          <p:nvPr/>
+        </p:nvPicPr>
+        <p:blipFill>
+          <a:blip r:embed="rId2"/>
+          <a:stretch>
+            <a:fillRect/>
+          </a:stretch>
+        </p:blipFill>
+        <p:spPr>
+          <a:xfrm>
+            <a:off x="1371600" y="914400"/>
+            <a:ext cx="9445752" cy="4572000"/>
+          </a:xfrm>
+          <a:prstGeom prst="rect">
+            <a:avLst/>
+          </a:prstGeom>
+        </p:spPr>
+      </p:pic>
+      <p:sp>
+        <p:nvSpPr>
+          <p:cNvPr id="4" name="TextBox 3"/>
+          <p:cNvSpPr txBox="1"/>
+          <p:nvPr/>
+        </p:nvSpPr>
+        <p:spPr>
+          <a:xfrm>
+            <a:off x="457200" y="5760720"/>
+            <a:ext cx="11274552" cy="731520"/>
+          </a:xfrm>
+          <a:prstGeom prst="rect">
+            <a:avLst/>
+          </a:prstGeom>
+          <a:noFill/>
+        </p:spPr>
+        <p:txBody>
+          <a:bodyPr wrap="square">
+            <a:spAutoFit/>
+          </a:bodyPr>
+          <a:lstStyle/>
+          <a:p>
+            <a:pPr algn="ctr">
+              <a:defRPr sz="1000" i="1"/>
+            </a:pPr>
+            <a:r>
+              <a:t>輸入漏出が実効乗数を低下させる。灰色×は名目乗数。赤矢印は日本の漏出調整効果。</a:t>
+            </a:r>
+          </a:p>
+        </p:txBody>
+      </p:sp>
+    </p:spTree>
+  </p:cSld>
+  <p:clrMapOvr>
+    <a:masterClrMapping/>
+  </p:clrMapOvr>
+</p:sld>
+</file>
+
+<file path=ppt/slides/slide8.xml><?xml version="1.0" encoding="utf-8"?>
+<p:sld xmlns:a="http://schemas.openxmlformats.org/drawingml/2006/main" xmlns:p="http://schemas.openxmlformats.org/presentationml/2006/main" xmlns:r="http://schemas.openxmlformats.org/officeDocument/2006/relationships">
+  <p:cSld>
+    <p:spTree>
+      <p:nvGrpSpPr>
+        <p:cNvPr id="1" name=""/>
+        <p:cNvGrpSpPr/>
+        <p:nvPr/>
+      </p:nvGrpSpPr>
+      <p:grpSpPr/>
+      <p:sp>
+        <p:nvSpPr>
+          <p:cNvPr id="2" name="TextBox 1"/>
+          <p:cNvSpPr txBox="1"/>
+          <p:nvPr/>
+        </p:nvSpPr>
+        <p:spPr>
+          <a:xfrm>
+            <a:off x="457200" y="182880"/>
+            <a:ext cx="11274552" cy="548640"/>
+          </a:xfrm>
+          <a:prstGeom prst="rect">
+            <a:avLst/>
+          </a:prstGeom>
+          <a:noFill/>
+        </p:spPr>
+        <p:txBody>
+          <a:bodyPr wrap="none">
+            <a:spAutoFit/>
+          </a:bodyPr>
+          <a:lstStyle/>
+          <a:p>
+            <a:pPr algn="ctr">
+              <a:defRPr sz="1800" b="1"/>
+            </a:pPr>
+            <a:r>
+              <a:t>図8. 日本のカウンターファクチュアル分析</a:t>
+            </a:r>
+          </a:p>
+        </p:txBody>
+      </p:sp>
+      <p:pic>
+        <p:nvPicPr>
+          <p:cNvPr id="3" name="Picture 2" descr="fig8_counterfactual_japan_ja.png"/>
+          <p:cNvPicPr>
+            <a:picLocks noChangeAspect="1"/>
+          </p:cNvPicPr>
+          <p:nvPr/>
+        </p:nvPicPr>
+        <p:blipFill>
+          <a:blip r:embed="rId2"/>
+          <a:stretch>
+            <a:fillRect/>
+          </a:stretch>
+        </p:blipFill>
+        <p:spPr>
+          <a:xfrm>
+            <a:off x="1371600" y="914400"/>
+            <a:ext cx="9445752" cy="4572000"/>
+          </a:xfrm>
+          <a:prstGeom prst="rect">
+            <a:avLst/>
+          </a:prstGeom>
+        </p:spPr>
+      </p:pic>
+      <p:sp>
+        <p:nvSpPr>
+          <p:cNvPr id="4" name="TextBox 3"/>
+          <p:cNvSpPr txBox="1"/>
+          <p:nvPr/>
+        </p:nvSpPr>
+        <p:spPr>
+          <a:xfrm>
+            <a:off x="457200" y="5760720"/>
+            <a:ext cx="11274552" cy="731520"/>
+          </a:xfrm>
+          <a:prstGeom prst="rect">
+            <a:avLst/>
+          </a:prstGeom>
+          <a:noFill/>
+        </p:spPr>
+        <p:txBody>
+          <a:bodyPr wrap="square">
+            <a:spAutoFit/>
+          </a:bodyPr>
+          <a:lstStyle/>
+          <a:p>
+            <a:pPr algn="ctr">
+              <a:defRPr sz="1000" i="1"/>
+            </a:pPr>
+            <a:r>
+              <a:t>ベースライン（1.04）、A: OECD平均装置密度（0.98）、B: 国内製造（1.09）、C: A+B（1.03）。</a:t>
             </a:r>
           </a:p>
         </p:txBody>
